--- a/Dokumentation/MinecraftWikiPPTX.pptx
+++ b/Dokumentation/MinecraftWikiPPTX.pptx
@@ -709,7 +709,7 @@
           <a:p>
             <a:fld id="{426D9DD8-02BC-4DB7-B292-89D2677F1421}" type="datetimeFigureOut">
               <a:rPr lang="de-CH" smtClean="0"/>
-              <a:t>13.06.2026</a:t>
+              <a:t>14.06.2026</a:t>
             </a:fld>
             <a:endParaRPr lang="de-CH"/>
           </a:p>
@@ -909,7 +909,7 @@
           <a:p>
             <a:fld id="{426D9DD8-02BC-4DB7-B292-89D2677F1421}" type="datetimeFigureOut">
               <a:rPr lang="de-CH" smtClean="0"/>
-              <a:t>13.06.2026</a:t>
+              <a:t>14.06.2026</a:t>
             </a:fld>
             <a:endParaRPr lang="de-CH"/>
           </a:p>
@@ -1119,7 +1119,7 @@
           <a:p>
             <a:fld id="{426D9DD8-02BC-4DB7-B292-89D2677F1421}" type="datetimeFigureOut">
               <a:rPr lang="de-CH" smtClean="0"/>
-              <a:t>13.06.2026</a:t>
+              <a:t>14.06.2026</a:t>
             </a:fld>
             <a:endParaRPr lang="de-CH"/>
           </a:p>
@@ -1319,7 +1319,7 @@
           <a:p>
             <a:fld id="{426D9DD8-02BC-4DB7-B292-89D2677F1421}" type="datetimeFigureOut">
               <a:rPr lang="de-CH" smtClean="0"/>
-              <a:t>13.06.2026</a:t>
+              <a:t>14.06.2026</a:t>
             </a:fld>
             <a:endParaRPr lang="de-CH"/>
           </a:p>
@@ -1595,7 +1595,7 @@
           <a:p>
             <a:fld id="{426D9DD8-02BC-4DB7-B292-89D2677F1421}" type="datetimeFigureOut">
               <a:rPr lang="de-CH" smtClean="0"/>
-              <a:t>13.06.2026</a:t>
+              <a:t>14.06.2026</a:t>
             </a:fld>
             <a:endParaRPr lang="de-CH"/>
           </a:p>
@@ -1863,7 +1863,7 @@
           <a:p>
             <a:fld id="{426D9DD8-02BC-4DB7-B292-89D2677F1421}" type="datetimeFigureOut">
               <a:rPr lang="de-CH" smtClean="0"/>
-              <a:t>13.06.2026</a:t>
+              <a:t>14.06.2026</a:t>
             </a:fld>
             <a:endParaRPr lang="de-CH"/>
           </a:p>
@@ -2278,7 +2278,7 @@
           <a:p>
             <a:fld id="{426D9DD8-02BC-4DB7-B292-89D2677F1421}" type="datetimeFigureOut">
               <a:rPr lang="de-CH" smtClean="0"/>
-              <a:t>13.06.2026</a:t>
+              <a:t>14.06.2026</a:t>
             </a:fld>
             <a:endParaRPr lang="de-CH"/>
           </a:p>
@@ -2420,7 +2420,7 @@
           <a:p>
             <a:fld id="{426D9DD8-02BC-4DB7-B292-89D2677F1421}" type="datetimeFigureOut">
               <a:rPr lang="de-CH" smtClean="0"/>
-              <a:t>13.06.2026</a:t>
+              <a:t>14.06.2026</a:t>
             </a:fld>
             <a:endParaRPr lang="de-CH"/>
           </a:p>
@@ -2533,7 +2533,7 @@
           <a:p>
             <a:fld id="{426D9DD8-02BC-4DB7-B292-89D2677F1421}" type="datetimeFigureOut">
               <a:rPr lang="de-CH" smtClean="0"/>
-              <a:t>13.06.2026</a:t>
+              <a:t>14.06.2026</a:t>
             </a:fld>
             <a:endParaRPr lang="de-CH"/>
           </a:p>
@@ -2846,7 +2846,7 @@
           <a:p>
             <a:fld id="{426D9DD8-02BC-4DB7-B292-89D2677F1421}" type="datetimeFigureOut">
               <a:rPr lang="de-CH" smtClean="0"/>
-              <a:t>13.06.2026</a:t>
+              <a:t>14.06.2026</a:t>
             </a:fld>
             <a:endParaRPr lang="de-CH"/>
           </a:p>
@@ -3135,7 +3135,7 @@
           <a:p>
             <a:fld id="{426D9DD8-02BC-4DB7-B292-89D2677F1421}" type="datetimeFigureOut">
               <a:rPr lang="de-CH" smtClean="0"/>
-              <a:t>13.06.2026</a:t>
+              <a:t>14.06.2026</a:t>
             </a:fld>
             <a:endParaRPr lang="de-CH"/>
           </a:p>
@@ -3387,7 +3387,7 @@
           <a:p>
             <a:fld id="{426D9DD8-02BC-4DB7-B292-89D2677F1421}" type="datetimeFigureOut">
               <a:rPr lang="de-CH" smtClean="0"/>
-              <a:t>13.06.2026</a:t>
+              <a:t>14.06.2026</a:t>
             </a:fld>
             <a:endParaRPr lang="de-CH"/>
           </a:p>
@@ -3856,7 +3856,7 @@
             </a:extLst>
           </p:cNvPr>
           <p:cNvSpPr>
-            <a:spLocks/>
+            <a:spLocks noGrp="1"/>
           </p:cNvSpPr>
           <p:nvPr>
             <p:ph type="subTitle" idx="1"/>
@@ -5070,7 +5070,7 @@
         </p:spPr>
         <p:txBody>
           <a:bodyPr>
-            <a:normAutofit lnSpcReduction="10000"/>
+            <a:normAutofit fontScale="85000" lnSpcReduction="20000"/>
           </a:bodyPr>
           <a:lstStyle/>
           <a:p>
@@ -5200,6 +5200,45 @@
               </a:rPr>
               <a:t>Auswerten</a:t>
             </a:r>
+          </a:p>
+          <a:p>
+            <a:pPr>
+              <a:buFont typeface="Wingdings" panose="05000000000000000000" pitchFamily="2" charset="2"/>
+              <a:buChar char="§"/>
+            </a:pPr>
+            <a:r>
+              <a:rPr lang="de-CH" sz="2000" dirty="0">
+                <a:solidFill>
+                  <a:schemeClr val="bg1"/>
+                </a:solidFill>
+                <a:latin typeface="Minecraft" panose="02000603000000000000" pitchFamily="2" charset="0"/>
+                <a:ea typeface="Minecraft" panose="02000603000000000000" pitchFamily="2" charset="0"/>
+              </a:rPr>
+              <a:t>Live Demo</a:t>
+            </a:r>
+          </a:p>
+          <a:p>
+            <a:pPr>
+              <a:buFont typeface="Wingdings" panose="05000000000000000000" pitchFamily="2" charset="2"/>
+              <a:buChar char="§"/>
+            </a:pPr>
+            <a:r>
+              <a:rPr lang="de-CH" sz="2000" dirty="0" err="1">
+                <a:solidFill>
+                  <a:schemeClr val="bg1"/>
+                </a:solidFill>
+                <a:latin typeface="Minecraft" panose="02000603000000000000" pitchFamily="2" charset="0"/>
+                <a:ea typeface="Minecraft" panose="02000603000000000000" pitchFamily="2" charset="0"/>
+              </a:rPr>
+              <a:t>Schwirigkeiten</a:t>
+            </a:r>
+            <a:endParaRPr lang="de-CH" sz="2000" dirty="0">
+              <a:solidFill>
+                <a:schemeClr val="bg1"/>
+              </a:solidFill>
+              <a:latin typeface="Minecraft" panose="02000603000000000000" pitchFamily="2" charset="0"/>
+              <a:ea typeface="Minecraft" panose="02000603000000000000" pitchFamily="2" charset="0"/>
+            </a:endParaRPr>
           </a:p>
         </p:txBody>
       </p:sp>

--- a/Dokumentation/MinecraftWikiPPTX.pptx
+++ b/Dokumentation/MinecraftWikiPPTX.pptx
@@ -4788,26 +4788,107 @@
       </p:pic>
       <p:sp>
         <p:nvSpPr>
-          <p:cNvPr id="9" name="Inhaltsplatzhalter 8">
-            <a:extLst>
-              <a:ext uri="{FF2B5EF4-FFF2-40B4-BE49-F238E27FC236}">
-                <a16:creationId xmlns:a16="http://schemas.microsoft.com/office/drawing/2014/main" id="{FFB17EF2-D37B-1B3B-6125-3775C936C593}"/>
-              </a:ext>
-            </a:extLst>
-          </p:cNvPr>
-          <p:cNvSpPr>
-            <a:spLocks noGrp="1"/>
-          </p:cNvSpPr>
-          <p:nvPr>
-            <p:ph idx="1"/>
-          </p:nvPr>
-        </p:nvSpPr>
-        <p:spPr/>
-        <p:txBody>
-          <a:bodyPr/>
+          <p:cNvPr id="6" name="Rechteck 5">
+            <a:extLst>
+              <a:ext uri="{FF2B5EF4-FFF2-40B4-BE49-F238E27FC236}">
+                <a16:creationId xmlns:a16="http://schemas.microsoft.com/office/drawing/2014/main" id="{4D0E667D-5584-EB8A-F9A4-BC220FE674F5}"/>
+              </a:ext>
+            </a:extLst>
+          </p:cNvPr>
+          <p:cNvSpPr>
+            <a:spLocks noGrp="1" noRot="1" noMove="1" noResize="1" noEditPoints="1" noAdjustHandles="1" noChangeArrowheads="1" noChangeShapeType="1"/>
+          </p:cNvSpPr>
+          <p:nvPr/>
+        </p:nvSpPr>
+        <p:spPr>
+          <a:xfrm>
+            <a:off x="2603771" y="3785683"/>
+            <a:ext cx="6984459" cy="479898"/>
+          </a:xfrm>
+          <a:prstGeom prst="rect">
+            <a:avLst/>
+          </a:prstGeom>
+          <a:noFill/>
+          <a:ln w="76200">
+            <a:solidFill>
+              <a:schemeClr val="bg1"/>
+            </a:solidFill>
+          </a:ln>
+        </p:spPr>
+        <p:style>
+          <a:lnRef idx="2">
+            <a:schemeClr val="accent1">
+              <a:shade val="15000"/>
+            </a:schemeClr>
+          </a:lnRef>
+          <a:fillRef idx="1">
+            <a:schemeClr val="accent1"/>
+          </a:fillRef>
+          <a:effectRef idx="0">
+            <a:schemeClr val="accent1"/>
+          </a:effectRef>
+          <a:fontRef idx="minor">
+            <a:schemeClr val="lt1"/>
+          </a:fontRef>
+        </p:style>
+        <p:txBody>
+          <a:bodyPr rtlCol="0" anchor="ctr"/>
           <a:lstStyle/>
           <a:p>
+            <a:pPr algn="ctr"/>
             <a:endParaRPr lang="de-CH"/>
+          </a:p>
+        </p:txBody>
+      </p:sp>
+      <p:sp>
+        <p:nvSpPr>
+          <p:cNvPr id="7" name="Rechteck 6">
+            <a:extLst>
+              <a:ext uri="{FF2B5EF4-FFF2-40B4-BE49-F238E27FC236}">
+                <a16:creationId xmlns:a16="http://schemas.microsoft.com/office/drawing/2014/main" id="{111A74D4-C5E4-29D5-D11D-2B069C2DFAC0}"/>
+              </a:ext>
+            </a:extLst>
+          </p:cNvPr>
+          <p:cNvSpPr/>
+          <p:nvPr/>
+        </p:nvSpPr>
+        <p:spPr>
+          <a:xfrm>
+            <a:off x="2710774" y="3904034"/>
+            <a:ext cx="6770452" cy="243196"/>
+          </a:xfrm>
+          <a:prstGeom prst="rect">
+            <a:avLst/>
+          </a:prstGeom>
+          <a:solidFill>
+            <a:schemeClr val="bg1"/>
+          </a:solidFill>
+          <a:ln w="76200">
+            <a:noFill/>
+          </a:ln>
+        </p:spPr>
+        <p:style>
+          <a:lnRef idx="2">
+            <a:schemeClr val="accent1">
+              <a:shade val="15000"/>
+            </a:schemeClr>
+          </a:lnRef>
+          <a:fillRef idx="1">
+            <a:schemeClr val="accent1"/>
+          </a:fillRef>
+          <a:effectRef idx="0">
+            <a:schemeClr val="accent1"/>
+          </a:effectRef>
+          <a:fontRef idx="minor">
+            <a:schemeClr val="lt1"/>
+          </a:fontRef>
+        </p:style>
+        <p:txBody>
+          <a:bodyPr rtlCol="0" anchor="ctr"/>
+          <a:lstStyle/>
+          <a:p>
+            <a:pPr algn="ctr"/>
+            <a:endParaRPr lang="de-CH" dirty="0"/>
           </a:p>
         </p:txBody>
       </p:sp>
@@ -4824,6 +4905,95 @@
   <p:transition spd="slow">
     <p:push dir="r"/>
   </p:transition>
+  <p:timing>
+    <p:tnLst>
+      <p:par>
+        <p:cTn id="1" dur="indefinite" restart="never" nodeType="tmRoot">
+          <p:childTnLst>
+            <p:seq concurrent="1" nextAc="seek">
+              <p:cTn id="2" dur="indefinite" nodeType="mainSeq">
+                <p:childTnLst>
+                  <p:par>
+                    <p:cTn id="3" fill="hold">
+                      <p:stCondLst>
+                        <p:cond delay="indefinite"/>
+                        <p:cond evt="onBegin" delay="0">
+                          <p:tn val="2"/>
+                        </p:cond>
+                      </p:stCondLst>
+                      <p:childTnLst>
+                        <p:par>
+                          <p:cTn id="4" fill="hold">
+                            <p:stCondLst>
+                              <p:cond delay="0"/>
+                            </p:stCondLst>
+                            <p:childTnLst>
+                              <p:par>
+                                <p:cTn id="5" presetID="22" presetClass="entr" presetSubtype="8" fill="hold" grpId="0" nodeType="withEffect">
+                                  <p:stCondLst>
+                                    <p:cond delay="0"/>
+                                  </p:stCondLst>
+                                  <p:childTnLst>
+                                    <p:set>
+                                      <p:cBhvr>
+                                        <p:cTn id="6" dur="1" fill="hold">
+                                          <p:stCondLst>
+                                            <p:cond delay="0"/>
+                                          </p:stCondLst>
+                                        </p:cTn>
+                                        <p:tgtEl>
+                                          <p:spTgt spid="7"/>
+                                        </p:tgtEl>
+                                        <p:attrNameLst>
+                                          <p:attrName>style.visibility</p:attrName>
+                                        </p:attrNameLst>
+                                      </p:cBhvr>
+                                      <p:to>
+                                        <p:strVal val="visible"/>
+                                      </p:to>
+                                    </p:set>
+                                    <p:animEffect transition="in" filter="wipe(left)">
+                                      <p:cBhvr>
+                                        <p:cTn id="7" dur="30000"/>
+                                        <p:tgtEl>
+                                          <p:spTgt spid="7"/>
+                                        </p:tgtEl>
+                                      </p:cBhvr>
+                                    </p:animEffect>
+                                  </p:childTnLst>
+                                </p:cTn>
+                              </p:par>
+                            </p:childTnLst>
+                          </p:cTn>
+                        </p:par>
+                      </p:childTnLst>
+                    </p:cTn>
+                  </p:par>
+                </p:childTnLst>
+              </p:cTn>
+              <p:prevCondLst>
+                <p:cond evt="onPrev" delay="0">
+                  <p:tgtEl>
+                    <p:sldTgt/>
+                  </p:tgtEl>
+                </p:cond>
+              </p:prevCondLst>
+              <p:nextCondLst>
+                <p:cond evt="onNext" delay="0">
+                  <p:tgtEl>
+                    <p:sldTgt/>
+                  </p:tgtEl>
+                </p:cond>
+              </p:nextCondLst>
+            </p:seq>
+          </p:childTnLst>
+        </p:cTn>
+      </p:par>
+    </p:tnLst>
+    <p:bldLst>
+      <p:bldP spid="7" grpId="0" animBg="1"/>
+    </p:bldLst>
+  </p:timing>
 </p:sld>
 </file>
 

--- a/Dokumentation/MinecraftWikiPPTX.pptx
+++ b/Dokumentation/MinecraftWikiPPTX.pptx
@@ -5,7 +5,7 @@
     <p:sldMasterId id="2147483694" r:id="rId1"/>
   </p:sldMasterIdLst>
   <p:notesMasterIdLst>
-    <p:notesMasterId r:id="rId14"/>
+    <p:notesMasterId r:id="rId15"/>
   </p:notesMasterIdLst>
   <p:sldIdLst>
     <p:sldId id="256" r:id="rId2"/>
@@ -20,6 +20,7 @@
     <p:sldId id="265" r:id="rId11"/>
     <p:sldId id="266" r:id="rId12"/>
     <p:sldId id="267" r:id="rId13"/>
+    <p:sldId id="268" r:id="rId14"/>
   </p:sldIdLst>
   <p:sldSz cx="12192000" cy="6858000"/>
   <p:notesSz cx="6858000" cy="9144000"/>
@@ -5165,6 +5166,107 @@
 </p:sld>
 </file>
 
+<file path=ppt/slides/slide13.xml><?xml version="1.0" encoding="utf-8"?>
+<p:sld xmlns:a="http://schemas.openxmlformats.org/drawingml/2006/main" xmlns:r="http://schemas.openxmlformats.org/officeDocument/2006/relationships" xmlns:p="http://schemas.openxmlformats.org/presentationml/2006/main">
+  <p:cSld>
+    <p:bg>
+      <p:bgPr>
+        <a:blipFill dpi="0" rotWithShape="1">
+          <a:blip r:embed="rId2">
+            <a:lum/>
+          </a:blip>
+          <a:srcRect/>
+          <a:stretch>
+            <a:fillRect/>
+          </a:stretch>
+        </a:blipFill>
+        <a:effectLst/>
+      </p:bgPr>
+    </p:bg>
+    <p:spTree>
+      <p:nvGrpSpPr>
+        <p:cNvPr id="1" name="">
+          <a:extLst>
+            <a:ext uri="{FF2B5EF4-FFF2-40B4-BE49-F238E27FC236}">
+              <a16:creationId xmlns:a16="http://schemas.microsoft.com/office/drawing/2014/main" id="{9482B940-39AD-77C7-CE6C-ED7F17573B4E}"/>
+            </a:ext>
+          </a:extLst>
+        </p:cNvPr>
+        <p:cNvGrpSpPr/>
+        <p:nvPr/>
+      </p:nvGrpSpPr>
+      <p:grpSpPr>
+        <a:xfrm>
+          <a:off x="0" y="0"/>
+          <a:ext cx="0" cy="0"/>
+          <a:chOff x="0" y="0"/>
+          <a:chExt cx="0" cy="0"/>
+        </a:xfrm>
+      </p:grpSpPr>
+      <p:sp>
+        <p:nvSpPr>
+          <p:cNvPr id="2" name="Titel 1">
+            <a:extLst>
+              <a:ext uri="{FF2B5EF4-FFF2-40B4-BE49-F238E27FC236}">
+                <a16:creationId xmlns:a16="http://schemas.microsoft.com/office/drawing/2014/main" id="{EB79BE64-1F46-FAF0-DE0F-11D9689B7683}"/>
+              </a:ext>
+            </a:extLst>
+          </p:cNvPr>
+          <p:cNvSpPr>
+            <a:spLocks noGrp="1"/>
+          </p:cNvSpPr>
+          <p:nvPr>
+            <p:ph type="title"/>
+          </p:nvPr>
+        </p:nvSpPr>
+        <p:spPr>
+          <a:xfrm>
+            <a:off x="4257675" y="3429000"/>
+            <a:ext cx="3676650" cy="1325563"/>
+          </a:xfrm>
+        </p:spPr>
+        <p:txBody>
+          <a:bodyPr>
+            <a:normAutofit fontScale="90000"/>
+          </a:bodyPr>
+          <a:lstStyle/>
+          <a:p>
+            <a:r>
+              <a:rPr lang="de-CH" sz="10700" dirty="0">
+                <a:solidFill>
+                  <a:schemeClr val="bg1"/>
+                </a:solidFill>
+                <a:latin typeface="Minecraft" panose="02000603000000000000" pitchFamily="2" charset="0"/>
+                <a:ea typeface="Minecraft" panose="02000603000000000000" pitchFamily="2" charset="0"/>
+              </a:rPr>
+              <a:t>ENDE</a:t>
+            </a:r>
+            <a:endParaRPr lang="de-CH" dirty="0">
+              <a:solidFill>
+                <a:schemeClr val="bg1"/>
+              </a:solidFill>
+              <a:latin typeface="Minecraft" panose="02000603000000000000" pitchFamily="2" charset="0"/>
+              <a:ea typeface="Minecraft" panose="02000603000000000000" pitchFamily="2" charset="0"/>
+            </a:endParaRPr>
+          </a:p>
+        </p:txBody>
+      </p:sp>
+    </p:spTree>
+    <p:extLst>
+      <p:ext uri="{BB962C8B-B14F-4D97-AF65-F5344CB8AC3E}">
+        <p14:creationId xmlns:p14="http://schemas.microsoft.com/office/powerpoint/2010/main" val="2202596651"/>
+      </p:ext>
+    </p:extLst>
+  </p:cSld>
+  <p:clrMapOvr>
+    <a:masterClrMapping/>
+  </p:clrMapOvr>
+  <p:transition spd="slow">
+    <p:push dir="r"/>
+  </p:transition>
+</p:sld>
+</file>
+
 <file path=ppt/slides/slide2.xml><?xml version="1.0" encoding="utf-8"?>
 <p:sld xmlns:a="http://schemas.openxmlformats.org/drawingml/2006/main" xmlns:r="http://schemas.openxmlformats.org/officeDocument/2006/relationships" xmlns:p="http://schemas.openxmlformats.org/presentationml/2006/main">
   <p:cSld>
@@ -5393,22 +5495,15 @@
               <a:buChar char="§"/>
             </a:pPr>
             <a:r>
-              <a:rPr lang="de-CH" sz="2000" dirty="0" err="1">
-                <a:solidFill>
-                  <a:schemeClr val="bg1"/>
-                </a:solidFill>
-                <a:latin typeface="Minecraft" panose="02000603000000000000" pitchFamily="2" charset="0"/>
-                <a:ea typeface="Minecraft" panose="02000603000000000000" pitchFamily="2" charset="0"/>
-              </a:rPr>
-              <a:t>Schwirigkeiten</a:t>
-            </a:r>
-            <a:endParaRPr lang="de-CH" sz="2000" dirty="0">
-              <a:solidFill>
-                <a:schemeClr val="bg1"/>
-              </a:solidFill>
-              <a:latin typeface="Minecraft" panose="02000603000000000000" pitchFamily="2" charset="0"/>
-              <a:ea typeface="Minecraft" panose="02000603000000000000" pitchFamily="2" charset="0"/>
-            </a:endParaRPr>
+              <a:rPr lang="de-CH" sz="2000" dirty="0">
+                <a:solidFill>
+                  <a:schemeClr val="bg1"/>
+                </a:solidFill>
+                <a:latin typeface="Minecraft" panose="02000603000000000000" pitchFamily="2" charset="0"/>
+                <a:ea typeface="Minecraft" panose="02000603000000000000" pitchFamily="2" charset="0"/>
+              </a:rPr>
+              <a:t>Schwierigkeiten</a:t>
+            </a:r>
           </a:p>
         </p:txBody>
       </p:sp>
@@ -6529,8 +6624,25 @@
           </a:xfrm>
         </p:spPr>
         <p:txBody>
-          <a:bodyPr/>
+          <a:bodyPr>
+            <a:normAutofit fontScale="55000" lnSpcReduction="20000"/>
+          </a:bodyPr>
           <a:lstStyle/>
+          <a:p>
+            <a:pPr marL="0" indent="0">
+              <a:buNone/>
+            </a:pPr>
+            <a:r>
+              <a:rPr lang="de-CH" sz="2000" dirty="0">
+                <a:solidFill>
+                  <a:schemeClr val="bg1"/>
+                </a:solidFill>
+                <a:latin typeface="Minecraft" panose="02000603000000000000" pitchFamily="2" charset="0"/>
+                <a:ea typeface="Minecraft" panose="02000603000000000000" pitchFamily="2" charset="0"/>
+              </a:rPr>
+              <a:t>1 Woche</a:t>
+            </a:r>
+          </a:p>
           <a:p>
             <a:pPr>
               <a:buFont typeface="Wingdings" panose="05000000000000000000" pitchFamily="2" charset="2"/>
@@ -6544,9 +6656,234 @@
                 <a:latin typeface="Minecraft" panose="02000603000000000000" pitchFamily="2" charset="0"/>
                 <a:ea typeface="Minecraft" panose="02000603000000000000" pitchFamily="2" charset="0"/>
               </a:rPr>
-              <a:t>Hallo</a:t>
-            </a:r>
-            <a:endParaRPr lang="de-CH" dirty="0">
+              <a:t>Aufgaben verteilen</a:t>
+            </a:r>
+          </a:p>
+          <a:p>
+            <a:pPr>
+              <a:buFont typeface="Wingdings" panose="05000000000000000000" pitchFamily="2" charset="2"/>
+              <a:buChar char="§"/>
+            </a:pPr>
+            <a:r>
+              <a:rPr lang="de-CH" sz="2000" dirty="0">
+                <a:solidFill>
+                  <a:schemeClr val="bg1"/>
+                </a:solidFill>
+                <a:latin typeface="Minecraft" panose="02000603000000000000" pitchFamily="2" charset="0"/>
+                <a:ea typeface="Minecraft" panose="02000603000000000000" pitchFamily="2" charset="0"/>
+              </a:rPr>
+              <a:t>Angefangen Webseite zu erstellen</a:t>
+            </a:r>
+          </a:p>
+          <a:p>
+            <a:pPr>
+              <a:buFont typeface="Wingdings" panose="05000000000000000000" pitchFamily="2" charset="2"/>
+              <a:buChar char="§"/>
+            </a:pPr>
+            <a:endParaRPr lang="de-CH" sz="2000" dirty="0">
+              <a:solidFill>
+                <a:schemeClr val="bg1"/>
+              </a:solidFill>
+              <a:latin typeface="Minecraft" panose="02000603000000000000" pitchFamily="2" charset="0"/>
+              <a:ea typeface="Minecraft" panose="02000603000000000000" pitchFamily="2" charset="0"/>
+            </a:endParaRPr>
+          </a:p>
+          <a:p>
+            <a:pPr marL="0" indent="0">
+              <a:buNone/>
+            </a:pPr>
+            <a:r>
+              <a:rPr lang="de-CH" sz="2000" dirty="0">
+                <a:solidFill>
+                  <a:schemeClr val="bg1"/>
+                </a:solidFill>
+                <a:latin typeface="Minecraft" panose="02000603000000000000" pitchFamily="2" charset="0"/>
+                <a:ea typeface="Minecraft" panose="02000603000000000000" pitchFamily="2" charset="0"/>
+              </a:rPr>
+              <a:t>2 Woche </a:t>
+            </a:r>
+          </a:p>
+          <a:p>
+            <a:pPr>
+              <a:buFont typeface="Wingdings" panose="05000000000000000000" pitchFamily="2" charset="2"/>
+              <a:buChar char="§"/>
+            </a:pPr>
+            <a:r>
+              <a:rPr lang="de-CH" sz="2000" dirty="0">
+                <a:solidFill>
+                  <a:schemeClr val="bg1"/>
+                </a:solidFill>
+                <a:latin typeface="Minecraft" panose="02000603000000000000" pitchFamily="2" charset="0"/>
+                <a:ea typeface="Minecraft" panose="02000603000000000000" pitchFamily="2" charset="0"/>
+              </a:rPr>
+              <a:t>Webseite weiter coden (Claud)</a:t>
+            </a:r>
+          </a:p>
+          <a:p>
+            <a:pPr>
+              <a:buFont typeface="Wingdings" panose="05000000000000000000" pitchFamily="2" charset="2"/>
+              <a:buChar char="§"/>
+            </a:pPr>
+            <a:r>
+              <a:rPr lang="de-CH" sz="2000" dirty="0">
+                <a:solidFill>
+                  <a:schemeClr val="bg1"/>
+                </a:solidFill>
+                <a:latin typeface="Minecraft" panose="02000603000000000000" pitchFamily="2" charset="0"/>
+                <a:ea typeface="Minecraft" panose="02000603000000000000" pitchFamily="2" charset="0"/>
+              </a:rPr>
+              <a:t>Demo Server aufsetzen</a:t>
+            </a:r>
+          </a:p>
+          <a:p>
+            <a:pPr>
+              <a:buFont typeface="Wingdings" panose="05000000000000000000" pitchFamily="2" charset="2"/>
+              <a:buChar char="§"/>
+            </a:pPr>
+            <a:r>
+              <a:rPr lang="de-CH" sz="2000" dirty="0">
+                <a:solidFill>
+                  <a:schemeClr val="bg1"/>
+                </a:solidFill>
+                <a:latin typeface="Minecraft" panose="02000603000000000000" pitchFamily="2" charset="0"/>
+                <a:ea typeface="Minecraft" panose="02000603000000000000" pitchFamily="2" charset="0"/>
+              </a:rPr>
+              <a:t>Dokumente bereitmachen und schreiben</a:t>
+            </a:r>
+          </a:p>
+          <a:p>
+            <a:pPr>
+              <a:buFont typeface="Wingdings" panose="05000000000000000000" pitchFamily="2" charset="2"/>
+              <a:buChar char="§"/>
+            </a:pPr>
+            <a:endParaRPr lang="de-CH" sz="2000" dirty="0">
+              <a:solidFill>
+                <a:schemeClr val="bg1"/>
+              </a:solidFill>
+              <a:latin typeface="Minecraft" panose="02000603000000000000" pitchFamily="2" charset="0"/>
+              <a:ea typeface="Minecraft" panose="02000603000000000000" pitchFamily="2" charset="0"/>
+            </a:endParaRPr>
+          </a:p>
+          <a:p>
+            <a:pPr marL="0" indent="0">
+              <a:buNone/>
+            </a:pPr>
+            <a:r>
+              <a:rPr lang="de-CH" sz="2000" dirty="0">
+                <a:solidFill>
+                  <a:schemeClr val="bg1"/>
+                </a:solidFill>
+                <a:latin typeface="Minecraft" panose="02000603000000000000" pitchFamily="2" charset="0"/>
+                <a:ea typeface="Minecraft" panose="02000603000000000000" pitchFamily="2" charset="0"/>
+              </a:rPr>
+              <a:t>3 Woche</a:t>
+            </a:r>
+          </a:p>
+          <a:p>
+            <a:pPr>
+              <a:buFont typeface="Wingdings" panose="05000000000000000000" pitchFamily="2" charset="2"/>
+              <a:buChar char="§"/>
+            </a:pPr>
+            <a:r>
+              <a:rPr lang="de-CH" sz="2000" dirty="0" err="1">
+                <a:solidFill>
+                  <a:schemeClr val="bg1"/>
+                </a:solidFill>
+                <a:latin typeface="Minecraft" panose="02000603000000000000" pitchFamily="2" charset="0"/>
+                <a:ea typeface="Minecraft" panose="02000603000000000000" pitchFamily="2" charset="0"/>
+              </a:rPr>
+              <a:t>Praesentation</a:t>
+            </a:r>
+            <a:r>
+              <a:rPr lang="de-CH" sz="2000" dirty="0">
+                <a:solidFill>
+                  <a:schemeClr val="bg1"/>
+                </a:solidFill>
+                <a:latin typeface="Minecraft" panose="02000603000000000000" pitchFamily="2" charset="0"/>
+                <a:ea typeface="Minecraft" panose="02000603000000000000" pitchFamily="2" charset="0"/>
+              </a:rPr>
+              <a:t> anfangen</a:t>
+            </a:r>
+          </a:p>
+          <a:p>
+            <a:pPr>
+              <a:buFont typeface="Wingdings" panose="05000000000000000000" pitchFamily="2" charset="2"/>
+              <a:buChar char="§"/>
+            </a:pPr>
+            <a:r>
+              <a:rPr lang="de-CH" sz="2000" dirty="0">
+                <a:solidFill>
+                  <a:schemeClr val="bg1"/>
+                </a:solidFill>
+                <a:latin typeface="Minecraft" panose="02000603000000000000" pitchFamily="2" charset="0"/>
+                <a:ea typeface="Minecraft" panose="02000603000000000000" pitchFamily="2" charset="0"/>
+              </a:rPr>
+              <a:t>Dokumente weiter </a:t>
+            </a:r>
+            <a:r>
+              <a:rPr lang="de-CH" sz="2000" dirty="0" err="1">
+                <a:solidFill>
+                  <a:schemeClr val="bg1"/>
+                </a:solidFill>
+                <a:latin typeface="Minecraft" panose="02000603000000000000" pitchFamily="2" charset="0"/>
+                <a:ea typeface="Minecraft" panose="02000603000000000000" pitchFamily="2" charset="0"/>
+              </a:rPr>
+              <a:t>fuehren</a:t>
+            </a:r>
+            <a:endParaRPr lang="de-CH" sz="2000" dirty="0">
+              <a:solidFill>
+                <a:schemeClr val="bg1"/>
+              </a:solidFill>
+              <a:latin typeface="Minecraft" panose="02000603000000000000" pitchFamily="2" charset="0"/>
+              <a:ea typeface="Minecraft" panose="02000603000000000000" pitchFamily="2" charset="0"/>
+            </a:endParaRPr>
+          </a:p>
+          <a:p>
+            <a:pPr>
+              <a:buFont typeface="Wingdings" panose="05000000000000000000" pitchFamily="2" charset="2"/>
+              <a:buChar char="§"/>
+            </a:pPr>
+            <a:r>
+              <a:rPr lang="de-CH" sz="2000" dirty="0">
+                <a:solidFill>
+                  <a:schemeClr val="bg1"/>
+                </a:solidFill>
+                <a:latin typeface="Minecraft" panose="02000603000000000000" pitchFamily="2" charset="0"/>
+                <a:ea typeface="Minecraft" panose="02000603000000000000" pitchFamily="2" charset="0"/>
+              </a:rPr>
+              <a:t>Server und Webseite Testen</a:t>
+            </a:r>
+          </a:p>
+          <a:p>
+            <a:pPr>
+              <a:buFont typeface="Wingdings" panose="05000000000000000000" pitchFamily="2" charset="2"/>
+              <a:buChar char="§"/>
+            </a:pPr>
+            <a:endParaRPr lang="de-CH" sz="2000" dirty="0">
+              <a:solidFill>
+                <a:schemeClr val="bg1"/>
+              </a:solidFill>
+              <a:latin typeface="Minecraft" panose="02000603000000000000" pitchFamily="2" charset="0"/>
+              <a:ea typeface="Minecraft" panose="02000603000000000000" pitchFamily="2" charset="0"/>
+            </a:endParaRPr>
+          </a:p>
+          <a:p>
+            <a:pPr marL="0" indent="0">
+              <a:buNone/>
+            </a:pPr>
+            <a:endParaRPr lang="de-CH" sz="2000" dirty="0">
+              <a:solidFill>
+                <a:schemeClr val="bg1"/>
+              </a:solidFill>
+              <a:latin typeface="Minecraft" panose="02000603000000000000" pitchFamily="2" charset="0"/>
+              <a:ea typeface="Minecraft" panose="02000603000000000000" pitchFamily="2" charset="0"/>
+            </a:endParaRPr>
+          </a:p>
+          <a:p>
+            <a:pPr marL="0" indent="0">
+              <a:buNone/>
+            </a:pPr>
+            <a:endParaRPr lang="de-CH" sz="2000" dirty="0">
               <a:solidFill>
                 <a:schemeClr val="bg1"/>
               </a:solidFill>

--- a/Dokumentation/MinecraftWikiPPTX.pptx
+++ b/Dokumentation/MinecraftWikiPPTX.pptx
@@ -5251,6 +5251,46 @@
           </a:p>
         </p:txBody>
       </p:sp>
+      <p:pic>
+        <p:nvPicPr>
+          <p:cNvPr id="6" name="Grafik 5" descr="Dragon Egg Minecraft Textures - NovaSkin">
+            <a:extLst>
+              <a:ext uri="{FF2B5EF4-FFF2-40B4-BE49-F238E27FC236}">
+                <a16:creationId xmlns:a16="http://schemas.microsoft.com/office/drawing/2014/main" id="{F8DC80EB-6EBB-F605-6608-692EC5972487}"/>
+              </a:ext>
+            </a:extLst>
+          </p:cNvPr>
+          <p:cNvPicPr>
+            <a:picLocks noChangeAspect="1"/>
+          </p:cNvPicPr>
+          <p:nvPr/>
+        </p:nvPicPr>
+        <p:blipFill>
+          <a:blip r:embed="rId3">
+            <a:extLst>
+              <a:ext uri="{BEBA8EAE-BF5A-486C-A8C5-ECC9F3942E4B}">
+                <a14:imgProps xmlns:a14="http://schemas.microsoft.com/office/drawing/2010/main">
+                  <a14:imgLayer r:embed="rId4">
+                    <a14:imgEffect>
+                      <a14:brightnessContrast bright="-40000"/>
+                    </a14:imgEffect>
+                  </a14:imgLayer>
+                </a14:imgProps>
+              </a:ext>
+            </a:extLst>
+          </a:blip>
+          <a:stretch/>
+        </p:blipFill>
+        <p:spPr>
+          <a:xfrm>
+            <a:off x="1193800" y="5051822"/>
+            <a:ext cx="774699" cy="847328"/>
+          </a:xfrm>
+          <a:prstGeom prst="rect">
+            <a:avLst/>
+          </a:prstGeom>
+        </p:spPr>
+      </p:pic>
     </p:spTree>
     <p:extLst>
       <p:ext uri="{BB962C8B-B14F-4D97-AF65-F5344CB8AC3E}">

--- a/Dokumentation/MinecraftWikiPPTX.pptx
+++ b/Dokumentation/MinecraftWikiPPTX.pptx
@@ -6135,10 +6135,10 @@
       </p:sp>
       <p:pic>
         <p:nvPicPr>
-          <p:cNvPr id="6" name="Grafik 5" descr="Steve Walk - Spieler Skin - NovaSkin">
-            <a:extLst>
-              <a:ext uri="{FF2B5EF4-FFF2-40B4-BE49-F238E27FC236}">
-                <a16:creationId xmlns:a16="http://schemas.microsoft.com/office/drawing/2014/main" id="{1ACA3FFE-22F3-C126-25B6-3F7E65D292DD}"/>
+          <p:cNvPr id="8" name="Grafik 7">
+            <a:extLst>
+              <a:ext uri="{FF2B5EF4-FFF2-40B4-BE49-F238E27FC236}">
+                <a16:creationId xmlns:a16="http://schemas.microsoft.com/office/drawing/2014/main" id="{F6FE799E-90E7-5B63-2AE5-FD869A2DDA1C}"/>
               </a:ext>
             </a:extLst>
           </p:cNvPr>
@@ -6148,25 +6148,13 @@
           <p:nvPr/>
         </p:nvPicPr>
         <p:blipFill>
-          <a:blip r:embed="rId2">
-            <a:extLst>
-              <a:ext uri="{BEBA8EAE-BF5A-486C-A8C5-ECC9F3942E4B}">
-                <a14:imgProps xmlns:a14="http://schemas.microsoft.com/office/drawing/2010/main">
-                  <a14:imgLayer r:embed="rId3">
-                    <a14:imgEffect>
-                      <a14:brightnessContrast bright="20000"/>
-                    </a14:imgEffect>
-                  </a14:imgLayer>
-                </a14:imgProps>
-              </a:ext>
-            </a:extLst>
-          </a:blip>
+          <a:blip r:embed="rId2"/>
           <a:stretch/>
         </p:blipFill>
         <p:spPr>
-          <a:xfrm flipH="1">
-            <a:off x="6649696" y="3429000"/>
-            <a:ext cx="2254268" cy="2442124"/>
+          <a:xfrm>
+            <a:off x="6649696" y="3430324"/>
+            <a:ext cx="2259646" cy="2440800"/>
           </a:xfrm>
           <a:prstGeom prst="rect">
             <a:avLst/>

--- a/Dokumentation/MinecraftWikiPPTX.pptx
+++ b/Dokumentation/MinecraftWikiPPTX.pptx
@@ -4669,6 +4669,380 @@
           </a:p>
         </p:txBody>
       </p:sp>
+      <p:sp>
+        <p:nvSpPr>
+          <p:cNvPr id="4" name="Inhaltsplatzhalter 2">
+            <a:extLst>
+              <a:ext uri="{FF2B5EF4-FFF2-40B4-BE49-F238E27FC236}">
+                <a16:creationId xmlns:a16="http://schemas.microsoft.com/office/drawing/2014/main" id="{E9520CBA-6DC0-A1F0-DEC6-06B9350BF95E}"/>
+              </a:ext>
+            </a:extLst>
+          </p:cNvPr>
+          <p:cNvSpPr txBox="1">
+            <a:spLocks/>
+          </p:cNvSpPr>
+          <p:nvPr/>
+        </p:nvSpPr>
+        <p:spPr>
+          <a:xfrm>
+            <a:off x="6096000" y="2304189"/>
+            <a:ext cx="5257800" cy="3153600"/>
+          </a:xfrm>
+          <a:prstGeom prst="rect">
+            <a:avLst/>
+          </a:prstGeom>
+        </p:spPr>
+        <p:txBody>
+          <a:bodyPr vert="horz" lIns="91440" tIns="45720" rIns="91440" bIns="45720" rtlCol="0">
+            <a:normAutofit fontScale="92500" lnSpcReduction="20000"/>
+          </a:bodyPr>
+          <a:lstStyle>
+            <a:lvl1pPr marL="228600" indent="-228600" algn="l" defTabSz="914400" rtl="0" eaLnBrk="1" latinLnBrk="0" hangingPunct="1">
+              <a:lnSpc>
+                <a:spcPct val="90000"/>
+              </a:lnSpc>
+              <a:spcBef>
+                <a:spcPts val="1000"/>
+              </a:spcBef>
+              <a:buFont typeface="Arial" panose="020B0604020202020204" pitchFamily="34" charset="0"/>
+              <a:buChar char="•"/>
+              <a:defRPr sz="2800" kern="1200">
+                <a:solidFill>
+                  <a:schemeClr val="tx1"/>
+                </a:solidFill>
+                <a:latin typeface="+mn-lt"/>
+                <a:ea typeface="+mn-ea"/>
+                <a:cs typeface="+mn-cs"/>
+              </a:defRPr>
+            </a:lvl1pPr>
+            <a:lvl2pPr marL="685800" indent="-228600" algn="l" defTabSz="914400" rtl="0" eaLnBrk="1" latinLnBrk="0" hangingPunct="1">
+              <a:lnSpc>
+                <a:spcPct val="90000"/>
+              </a:lnSpc>
+              <a:spcBef>
+                <a:spcPts val="500"/>
+              </a:spcBef>
+              <a:buFont typeface="Arial" panose="020B0604020202020204" pitchFamily="34" charset="0"/>
+              <a:buChar char="•"/>
+              <a:defRPr sz="2400" kern="1200">
+                <a:solidFill>
+                  <a:schemeClr val="tx1"/>
+                </a:solidFill>
+                <a:latin typeface="+mn-lt"/>
+                <a:ea typeface="+mn-ea"/>
+                <a:cs typeface="+mn-cs"/>
+              </a:defRPr>
+            </a:lvl2pPr>
+            <a:lvl3pPr marL="1143000" indent="-228600" algn="l" defTabSz="914400" rtl="0" eaLnBrk="1" latinLnBrk="0" hangingPunct="1">
+              <a:lnSpc>
+                <a:spcPct val="90000"/>
+              </a:lnSpc>
+              <a:spcBef>
+                <a:spcPts val="500"/>
+              </a:spcBef>
+              <a:buFont typeface="Arial" panose="020B0604020202020204" pitchFamily="34" charset="0"/>
+              <a:buChar char="•"/>
+              <a:defRPr sz="2000" kern="1200">
+                <a:solidFill>
+                  <a:schemeClr val="tx1"/>
+                </a:solidFill>
+                <a:latin typeface="+mn-lt"/>
+                <a:ea typeface="+mn-ea"/>
+                <a:cs typeface="+mn-cs"/>
+              </a:defRPr>
+            </a:lvl3pPr>
+            <a:lvl4pPr marL="1600200" indent="-228600" algn="l" defTabSz="914400" rtl="0" eaLnBrk="1" latinLnBrk="0" hangingPunct="1">
+              <a:lnSpc>
+                <a:spcPct val="90000"/>
+              </a:lnSpc>
+              <a:spcBef>
+                <a:spcPts val="500"/>
+              </a:spcBef>
+              <a:buFont typeface="Arial" panose="020B0604020202020204" pitchFamily="34" charset="0"/>
+              <a:buChar char="•"/>
+              <a:defRPr sz="1800" kern="1200">
+                <a:solidFill>
+                  <a:schemeClr val="tx1"/>
+                </a:solidFill>
+                <a:latin typeface="+mn-lt"/>
+                <a:ea typeface="+mn-ea"/>
+                <a:cs typeface="+mn-cs"/>
+              </a:defRPr>
+            </a:lvl4pPr>
+            <a:lvl5pPr marL="2057400" indent="-228600" algn="l" defTabSz="914400" rtl="0" eaLnBrk="1" latinLnBrk="0" hangingPunct="1">
+              <a:lnSpc>
+                <a:spcPct val="90000"/>
+              </a:lnSpc>
+              <a:spcBef>
+                <a:spcPts val="500"/>
+              </a:spcBef>
+              <a:buFont typeface="Arial" panose="020B0604020202020204" pitchFamily="34" charset="0"/>
+              <a:buChar char="•"/>
+              <a:defRPr sz="1800" kern="1200">
+                <a:solidFill>
+                  <a:schemeClr val="tx1"/>
+                </a:solidFill>
+                <a:latin typeface="+mn-lt"/>
+                <a:ea typeface="+mn-ea"/>
+                <a:cs typeface="+mn-cs"/>
+              </a:defRPr>
+            </a:lvl5pPr>
+            <a:lvl6pPr marL="2514600" indent="-228600" algn="l" defTabSz="914400" rtl="0" eaLnBrk="1" latinLnBrk="0" hangingPunct="1">
+              <a:lnSpc>
+                <a:spcPct val="90000"/>
+              </a:lnSpc>
+              <a:spcBef>
+                <a:spcPts val="500"/>
+              </a:spcBef>
+              <a:buFont typeface="Arial" panose="020B0604020202020204" pitchFamily="34" charset="0"/>
+              <a:buChar char="•"/>
+              <a:defRPr sz="1800" kern="1200">
+                <a:solidFill>
+                  <a:schemeClr val="tx1"/>
+                </a:solidFill>
+                <a:latin typeface="+mn-lt"/>
+                <a:ea typeface="+mn-ea"/>
+                <a:cs typeface="+mn-cs"/>
+              </a:defRPr>
+            </a:lvl6pPr>
+            <a:lvl7pPr marL="2971800" indent="-228600" algn="l" defTabSz="914400" rtl="0" eaLnBrk="1" latinLnBrk="0" hangingPunct="1">
+              <a:lnSpc>
+                <a:spcPct val="90000"/>
+              </a:lnSpc>
+              <a:spcBef>
+                <a:spcPts val="500"/>
+              </a:spcBef>
+              <a:buFont typeface="Arial" panose="020B0604020202020204" pitchFamily="34" charset="0"/>
+              <a:buChar char="•"/>
+              <a:defRPr sz="1800" kern="1200">
+                <a:solidFill>
+                  <a:schemeClr val="tx1"/>
+                </a:solidFill>
+                <a:latin typeface="+mn-lt"/>
+                <a:ea typeface="+mn-ea"/>
+                <a:cs typeface="+mn-cs"/>
+              </a:defRPr>
+            </a:lvl7pPr>
+            <a:lvl8pPr marL="3429000" indent="-228600" algn="l" defTabSz="914400" rtl="0" eaLnBrk="1" latinLnBrk="0" hangingPunct="1">
+              <a:lnSpc>
+                <a:spcPct val="90000"/>
+              </a:lnSpc>
+              <a:spcBef>
+                <a:spcPts val="500"/>
+              </a:spcBef>
+              <a:buFont typeface="Arial" panose="020B0604020202020204" pitchFamily="34" charset="0"/>
+              <a:buChar char="•"/>
+              <a:defRPr sz="1800" kern="1200">
+                <a:solidFill>
+                  <a:schemeClr val="tx1"/>
+                </a:solidFill>
+                <a:latin typeface="+mn-lt"/>
+                <a:ea typeface="+mn-ea"/>
+                <a:cs typeface="+mn-cs"/>
+              </a:defRPr>
+            </a:lvl8pPr>
+            <a:lvl9pPr marL="3886200" indent="-228600" algn="l" defTabSz="914400" rtl="0" eaLnBrk="1" latinLnBrk="0" hangingPunct="1">
+              <a:lnSpc>
+                <a:spcPct val="90000"/>
+              </a:lnSpc>
+              <a:spcBef>
+                <a:spcPts val="500"/>
+              </a:spcBef>
+              <a:buFont typeface="Arial" panose="020B0604020202020204" pitchFamily="34" charset="0"/>
+              <a:buChar char="•"/>
+              <a:defRPr sz="1800" kern="1200">
+                <a:solidFill>
+                  <a:schemeClr val="tx1"/>
+                </a:solidFill>
+                <a:latin typeface="+mn-lt"/>
+                <a:ea typeface="+mn-ea"/>
+                <a:cs typeface="+mn-cs"/>
+              </a:defRPr>
+            </a:lvl9pPr>
+          </a:lstStyle>
+          <a:p>
+            <a:pPr marL="0" indent="0">
+              <a:buFont typeface="Arial" panose="020B0604020202020204" pitchFamily="34" charset="0"/>
+              <a:buNone/>
+            </a:pPr>
+            <a:r>
+              <a:rPr lang="de-CH" sz="2000" dirty="0">
+                <a:solidFill>
+                  <a:schemeClr val="bg1"/>
+                </a:solidFill>
+                <a:latin typeface="Minecraft" panose="02000603000000000000" pitchFamily="2" charset="0"/>
+                <a:ea typeface="Minecraft" panose="02000603000000000000" pitchFamily="2" charset="0"/>
+              </a:rPr>
+              <a:t>Realisierung</a:t>
+            </a:r>
+          </a:p>
+          <a:p>
+            <a:pPr>
+              <a:buFont typeface="Wingdings" panose="05000000000000000000" pitchFamily="2" charset="2"/>
+              <a:buChar char="§"/>
+            </a:pPr>
+            <a:r>
+              <a:rPr lang="de-CH" sz="2000" dirty="0">
+                <a:solidFill>
+                  <a:schemeClr val="bg1"/>
+                </a:solidFill>
+                <a:latin typeface="Minecraft" panose="02000603000000000000" pitchFamily="2" charset="0"/>
+                <a:ea typeface="Minecraft" panose="02000603000000000000" pitchFamily="2" charset="0"/>
+              </a:rPr>
+              <a:t>Anfangs langsam nachher schneller</a:t>
+            </a:r>
+          </a:p>
+          <a:p>
+            <a:pPr>
+              <a:buFont typeface="Wingdings" panose="05000000000000000000" pitchFamily="2" charset="2"/>
+              <a:buChar char="§"/>
+            </a:pPr>
+            <a:endParaRPr lang="de-CH" sz="2000" dirty="0">
+              <a:solidFill>
+                <a:schemeClr val="bg1"/>
+              </a:solidFill>
+              <a:latin typeface="Minecraft" panose="02000603000000000000" pitchFamily="2" charset="0"/>
+              <a:ea typeface="Minecraft" panose="02000603000000000000" pitchFamily="2" charset="0"/>
+            </a:endParaRPr>
+          </a:p>
+          <a:p>
+            <a:pPr marL="0" indent="0">
+              <a:buNone/>
+            </a:pPr>
+            <a:r>
+              <a:rPr lang="de-CH" sz="2000" dirty="0">
+                <a:solidFill>
+                  <a:schemeClr val="bg1"/>
+                </a:solidFill>
+                <a:latin typeface="Minecraft" panose="02000603000000000000" pitchFamily="2" charset="0"/>
+                <a:ea typeface="Minecraft" panose="02000603000000000000" pitchFamily="2" charset="0"/>
+              </a:rPr>
+              <a:t>Testphase</a:t>
+            </a:r>
+          </a:p>
+          <a:p>
+            <a:pPr>
+              <a:buFont typeface="Wingdings" panose="05000000000000000000" pitchFamily="2" charset="2"/>
+              <a:buChar char="§"/>
+            </a:pPr>
+            <a:r>
+              <a:rPr lang="de-CH" sz="2000" dirty="0">
+                <a:solidFill>
+                  <a:schemeClr val="bg1"/>
+                </a:solidFill>
+                <a:latin typeface="Minecraft" panose="02000603000000000000" pitchFamily="2" charset="0"/>
+                <a:ea typeface="Minecraft" panose="02000603000000000000" pitchFamily="2" charset="0"/>
+              </a:rPr>
+              <a:t>Mehrere </a:t>
+            </a:r>
+            <a:r>
+              <a:rPr lang="de-CH" sz="2000" dirty="0" err="1">
+                <a:solidFill>
+                  <a:schemeClr val="bg1"/>
+                </a:solidFill>
+                <a:latin typeface="Minecraft" panose="02000603000000000000" pitchFamily="2" charset="0"/>
+                <a:ea typeface="Minecraft" panose="02000603000000000000" pitchFamily="2" charset="0"/>
+              </a:rPr>
+              <a:t>Anlaeufe</a:t>
+            </a:r>
+            <a:endParaRPr lang="de-CH" sz="2000" dirty="0">
+              <a:solidFill>
+                <a:schemeClr val="bg1"/>
+              </a:solidFill>
+              <a:latin typeface="Minecraft" panose="02000603000000000000" pitchFamily="2" charset="0"/>
+              <a:ea typeface="Minecraft" panose="02000603000000000000" pitchFamily="2" charset="0"/>
+            </a:endParaRPr>
+          </a:p>
+          <a:p>
+            <a:pPr marL="0" indent="0">
+              <a:buNone/>
+            </a:pPr>
+            <a:endParaRPr lang="de-CH" sz="2000" dirty="0">
+              <a:solidFill>
+                <a:schemeClr val="bg1"/>
+              </a:solidFill>
+              <a:latin typeface="Minecraft" panose="02000603000000000000" pitchFamily="2" charset="0"/>
+              <a:ea typeface="Minecraft" panose="02000603000000000000" pitchFamily="2" charset="0"/>
+            </a:endParaRPr>
+          </a:p>
+          <a:p>
+            <a:pPr marL="0" indent="0">
+              <a:buNone/>
+            </a:pPr>
+            <a:r>
+              <a:rPr lang="de-CH" sz="2000" dirty="0">
+                <a:solidFill>
+                  <a:schemeClr val="bg1"/>
+                </a:solidFill>
+                <a:latin typeface="Minecraft" panose="02000603000000000000" pitchFamily="2" charset="0"/>
+                <a:ea typeface="Minecraft" panose="02000603000000000000" pitchFamily="2" charset="0"/>
+              </a:rPr>
+              <a:t>Meilenstein</a:t>
+            </a:r>
+          </a:p>
+          <a:p>
+            <a:pPr>
+              <a:buFont typeface="Wingdings" panose="05000000000000000000" pitchFamily="2" charset="2"/>
+              <a:buChar char="§"/>
+            </a:pPr>
+            <a:r>
+              <a:rPr lang="de-CH" sz="2000" dirty="0">
+                <a:solidFill>
+                  <a:schemeClr val="bg1"/>
+                </a:solidFill>
+                <a:latin typeface="Minecraft" panose="02000603000000000000" pitchFamily="2" charset="0"/>
+                <a:ea typeface="Minecraft" panose="02000603000000000000" pitchFamily="2" charset="0"/>
+              </a:rPr>
+              <a:t>Alle Termine einhalten</a:t>
+            </a:r>
+          </a:p>
+          <a:p>
+            <a:pPr>
+              <a:buFont typeface="Wingdings" panose="05000000000000000000" pitchFamily="2" charset="2"/>
+              <a:buChar char="§"/>
+            </a:pPr>
+            <a:r>
+              <a:rPr lang="de-CH" sz="2000" dirty="0">
+                <a:solidFill>
+                  <a:schemeClr val="bg1"/>
+                </a:solidFill>
+                <a:latin typeface="Minecraft" panose="02000603000000000000" pitchFamily="2" charset="0"/>
+                <a:ea typeface="Minecraft" panose="02000603000000000000" pitchFamily="2" charset="0"/>
+              </a:rPr>
+              <a:t>Gute </a:t>
+            </a:r>
+            <a:r>
+              <a:rPr lang="de-CH" sz="2000" dirty="0" err="1">
+                <a:solidFill>
+                  <a:schemeClr val="bg1"/>
+                </a:solidFill>
+                <a:latin typeface="Minecraft" panose="02000603000000000000" pitchFamily="2" charset="0"/>
+                <a:ea typeface="Minecraft" panose="02000603000000000000" pitchFamily="2" charset="0"/>
+              </a:rPr>
+              <a:t>Einschautzung</a:t>
+            </a:r>
+            <a:endParaRPr lang="de-CH" sz="2000" dirty="0">
+              <a:solidFill>
+                <a:schemeClr val="bg1"/>
+              </a:solidFill>
+              <a:latin typeface="Minecraft" panose="02000603000000000000" pitchFamily="2" charset="0"/>
+              <a:ea typeface="Minecraft" panose="02000603000000000000" pitchFamily="2" charset="0"/>
+            </a:endParaRPr>
+          </a:p>
+          <a:p>
+            <a:pPr marL="0" indent="0">
+              <a:buNone/>
+            </a:pPr>
+            <a:endParaRPr lang="de-CH" sz="2000" dirty="0">
+              <a:solidFill>
+                <a:schemeClr val="bg1"/>
+              </a:solidFill>
+              <a:latin typeface="Minecraft" panose="02000603000000000000" pitchFamily="2" charset="0"/>
+              <a:ea typeface="Minecraft" panose="02000603000000000000" pitchFamily="2" charset="0"/>
+            </a:endParaRPr>
+          </a:p>
+        </p:txBody>
+      </p:sp>
     </p:spTree>
     <p:extLst>
       <p:ext uri="{BB962C8B-B14F-4D97-AF65-F5344CB8AC3E}">
@@ -4682,6 +5056,128 @@
   <p:transition spd="slow">
     <p:push dir="r"/>
   </p:transition>
+  <p:timing>
+    <p:tnLst>
+      <p:par>
+        <p:cTn id="1" dur="indefinite" restart="never" nodeType="tmRoot">
+          <p:childTnLst>
+            <p:seq concurrent="1" nextAc="seek">
+              <p:cTn id="2" dur="indefinite" nodeType="mainSeq">
+                <p:childTnLst>
+                  <p:par>
+                    <p:cTn id="3" fill="hold">
+                      <p:stCondLst>
+                        <p:cond delay="indefinite"/>
+                      </p:stCondLst>
+                      <p:childTnLst>
+                        <p:par>
+                          <p:cTn id="4" fill="hold">
+                            <p:stCondLst>
+                              <p:cond delay="0"/>
+                            </p:stCondLst>
+                            <p:childTnLst>
+                              <p:par>
+                                <p:cTn id="5" presetID="14" presetClass="exit" presetSubtype="10" fill="hold" grpId="0" nodeType="clickEffect">
+                                  <p:stCondLst>
+                                    <p:cond delay="0"/>
+                                  </p:stCondLst>
+                                  <p:childTnLst>
+                                    <p:animEffect transition="out" filter="randombar(horizontal)">
+                                      <p:cBhvr>
+                                        <p:cTn id="6" dur="500"/>
+                                        <p:tgtEl>
+                                          <p:spTgt spid="9"/>
+                                        </p:tgtEl>
+                                      </p:cBhvr>
+                                    </p:animEffect>
+                                    <p:set>
+                                      <p:cBhvr>
+                                        <p:cTn id="7" dur="1" fill="hold">
+                                          <p:stCondLst>
+                                            <p:cond delay="499"/>
+                                          </p:stCondLst>
+                                        </p:cTn>
+                                        <p:tgtEl>
+                                          <p:spTgt spid="9"/>
+                                        </p:tgtEl>
+                                        <p:attrNameLst>
+                                          <p:attrName>style.visibility</p:attrName>
+                                        </p:attrNameLst>
+                                      </p:cBhvr>
+                                      <p:to>
+                                        <p:strVal val="hidden"/>
+                                      </p:to>
+                                    </p:set>
+                                  </p:childTnLst>
+                                </p:cTn>
+                              </p:par>
+                              <p:par>
+                                <p:cTn id="8" presetID="14" presetClass="entr" presetSubtype="10" fill="hold" grpId="0" nodeType="withEffect">
+                                  <p:stCondLst>
+                                    <p:cond delay="0"/>
+                                  </p:stCondLst>
+                                  <p:childTnLst>
+                                    <p:set>
+                                      <p:cBhvr>
+                                        <p:cTn id="9" dur="1" fill="hold">
+                                          <p:stCondLst>
+                                            <p:cond delay="0"/>
+                                          </p:stCondLst>
+                                        </p:cTn>
+                                        <p:tgtEl>
+                                          <p:spTgt spid="4"/>
+                                        </p:tgtEl>
+                                        <p:attrNameLst>
+                                          <p:attrName>style.visibility</p:attrName>
+                                        </p:attrNameLst>
+                                      </p:cBhvr>
+                                      <p:to>
+                                        <p:strVal val="visible"/>
+                                      </p:to>
+                                    </p:set>
+                                    <p:animEffect transition="in" filter="randombar(horizontal)">
+                                      <p:cBhvr>
+                                        <p:cTn id="10" dur="500"/>
+                                        <p:tgtEl>
+                                          <p:spTgt spid="4"/>
+                                        </p:tgtEl>
+                                      </p:cBhvr>
+                                    </p:animEffect>
+                                  </p:childTnLst>
+                                </p:cTn>
+                              </p:par>
+                            </p:childTnLst>
+                          </p:cTn>
+                        </p:par>
+                      </p:childTnLst>
+                    </p:cTn>
+                  </p:par>
+                </p:childTnLst>
+              </p:cTn>
+              <p:prevCondLst>
+                <p:cond evt="onPrev" delay="0">
+                  <p:tgtEl>
+                    <p:sldTgt/>
+                  </p:tgtEl>
+                </p:cond>
+              </p:prevCondLst>
+              <p:nextCondLst>
+                <p:cond evt="onNext" delay="0">
+                  <p:tgtEl>
+                    <p:sldTgt/>
+                  </p:tgtEl>
+                </p:cond>
+              </p:nextCondLst>
+            </p:seq>
+          </p:childTnLst>
+        </p:cTn>
+      </p:par>
+    </p:tnLst>
+    <p:bldLst>
+      <p:bldP spid="9" grpId="0"/>
+      <p:bldP spid="4" grpId="0"/>
+    </p:bldLst>
+  </p:timing>
 </p:sld>
 </file>
 
@@ -5150,6 +5646,43 @@
           </a:p>
         </p:txBody>
       </p:sp>
+      <p:pic>
+        <p:nvPicPr>
+          <p:cNvPr id="3" name="Grafik 2">
+            <a:extLst>
+              <a:ext uri="{FF2B5EF4-FFF2-40B4-BE49-F238E27FC236}">
+                <a16:creationId xmlns:a16="http://schemas.microsoft.com/office/drawing/2014/main" id="{7F46B003-27A1-CA7E-99F0-CEBAC2F85393}"/>
+              </a:ext>
+            </a:extLst>
+          </p:cNvPr>
+          <p:cNvPicPr>
+            <a:picLocks noChangeAspect="1"/>
+          </p:cNvPicPr>
+          <p:nvPr/>
+        </p:nvPicPr>
+        <p:blipFill>
+          <a:blip r:embed="rId3">
+            <a:extLst>
+              <a:ext uri="{28A0092B-C50C-407E-A947-70E740481C1C}">
+                <a14:useLocalDpi xmlns:a14="http://schemas.microsoft.com/office/drawing/2010/main" val="0"/>
+              </a:ext>
+            </a:extLst>
+          </a:blip>
+          <a:srcRect b="86055"/>
+          <a:stretch>
+            <a:fillRect/>
+          </a:stretch>
+        </p:blipFill>
+        <p:spPr>
+          <a:xfrm>
+            <a:off x="0" y="6379825"/>
+            <a:ext cx="12192000" cy="956350"/>
+          </a:xfrm>
+          <a:prstGeom prst="rect">
+            <a:avLst/>
+          </a:prstGeom>
+        </p:spPr>
+      </p:pic>
     </p:spTree>
     <p:extLst>
       <p:ext uri="{BB962C8B-B14F-4D97-AF65-F5344CB8AC3E}">
@@ -5203,26 +5736,108 @@
           <a:chExt cx="0" cy="0"/>
         </a:xfrm>
       </p:grpSpPr>
-      <p:sp>
-        <p:nvSpPr>
-          <p:cNvPr id="2" name="Titel 1">
-            <a:extLst>
-              <a:ext uri="{FF2B5EF4-FFF2-40B4-BE49-F238E27FC236}">
-                <a16:creationId xmlns:a16="http://schemas.microsoft.com/office/drawing/2014/main" id="{EB79BE64-1F46-FAF0-DE0F-11D9689B7683}"/>
-              </a:ext>
-            </a:extLst>
-          </p:cNvPr>
-          <p:cNvSpPr>
-            <a:spLocks noGrp="1"/>
-          </p:cNvSpPr>
-          <p:nvPr>
-            <p:ph type="title"/>
-          </p:nvPr>
-        </p:nvSpPr>
+      <p:pic>
+        <p:nvPicPr>
+          <p:cNvPr id="11" name="Grafik 10">
+            <a:extLst>
+              <a:ext uri="{FF2B5EF4-FFF2-40B4-BE49-F238E27FC236}">
+                <a16:creationId xmlns:a16="http://schemas.microsoft.com/office/drawing/2014/main" id="{FBE418C8-54DD-27EC-1A44-5F7B7B5698BF}"/>
+              </a:ext>
+            </a:extLst>
+          </p:cNvPr>
+          <p:cNvPicPr>
+            <a:picLocks noChangeAspect="1"/>
+          </p:cNvPicPr>
+          <p:nvPr/>
+        </p:nvPicPr>
+        <p:blipFill>
+          <a:blip r:embed="rId3">
+            <a:extLst>
+              <a:ext uri="{28A0092B-C50C-407E-A947-70E740481C1C}">
+                <a14:useLocalDpi xmlns:a14="http://schemas.microsoft.com/office/drawing/2010/main" val="0"/>
+              </a:ext>
+            </a:extLst>
+          </a:blip>
+          <a:stretch>
+            <a:fillRect/>
+          </a:stretch>
+        </p:blipFill>
         <p:spPr>
           <a:xfrm>
-            <a:off x="4257675" y="3429000"/>
-            <a:ext cx="3676650" cy="1325563"/>
+            <a:off x="0" y="0"/>
+            <a:ext cx="12192000" cy="6858000"/>
+          </a:xfrm>
+          <a:prstGeom prst="rect">
+            <a:avLst/>
+          </a:prstGeom>
+        </p:spPr>
+      </p:pic>
+      <p:pic>
+        <p:nvPicPr>
+          <p:cNvPr id="12" name="Grafik 11">
+            <a:extLst>
+              <a:ext uri="{FF2B5EF4-FFF2-40B4-BE49-F238E27FC236}">
+                <a16:creationId xmlns:a16="http://schemas.microsoft.com/office/drawing/2014/main" id="{7AE0DFA6-56B3-15BC-9A7E-5967113E68F7}"/>
+              </a:ext>
+            </a:extLst>
+          </p:cNvPr>
+          <p:cNvPicPr>
+            <a:picLocks noChangeAspect="1"/>
+          </p:cNvPicPr>
+          <p:nvPr/>
+        </p:nvPicPr>
+        <p:blipFill>
+          <a:blip r:embed="rId4">
+            <a:extLst>
+              <a:ext uri="{BEBA8EAE-BF5A-486C-A8C5-ECC9F3942E4B}">
+                <a14:imgProps xmlns:a14="http://schemas.microsoft.com/office/drawing/2010/main">
+                  <a14:imgLayer r:embed="rId5">
+                    <a14:imgEffect>
+                      <a14:brightnessContrast bright="-40000"/>
+                    </a14:imgEffect>
+                  </a14:imgLayer>
+                </a14:imgProps>
+              </a:ext>
+              <a:ext uri="{28A0092B-C50C-407E-A947-70E740481C1C}">
+                <a14:useLocalDpi xmlns:a14="http://schemas.microsoft.com/office/drawing/2010/main" val="0"/>
+              </a:ext>
+            </a:extLst>
+          </a:blip>
+          <a:srcRect t="27926" b="13982"/>
+          <a:stretch>
+            <a:fillRect/>
+          </a:stretch>
+        </p:blipFill>
+        <p:spPr>
+          <a:xfrm>
+            <a:off x="0" y="1915200"/>
+            <a:ext cx="12192000" cy="3983950"/>
+          </a:xfrm>
+          <a:prstGeom prst="rect">
+            <a:avLst/>
+          </a:prstGeom>
+        </p:spPr>
+      </p:pic>
+      <p:sp>
+        <p:nvSpPr>
+          <p:cNvPr id="2" name="Titel 1">
+            <a:extLst>
+              <a:ext uri="{FF2B5EF4-FFF2-40B4-BE49-F238E27FC236}">
+                <a16:creationId xmlns:a16="http://schemas.microsoft.com/office/drawing/2014/main" id="{EB79BE64-1F46-FAF0-DE0F-11D9689B7683}"/>
+              </a:ext>
+            </a:extLst>
+          </p:cNvPr>
+          <p:cNvSpPr>
+            <a:spLocks noGrp="1"/>
+          </p:cNvSpPr>
+          <p:nvPr>
+            <p:ph type="title"/>
+          </p:nvPr>
+        </p:nvSpPr>
+        <p:spPr>
+          <a:xfrm>
+            <a:off x="4740082" y="3429000"/>
+            <a:ext cx="2711837" cy="1325563"/>
           </a:xfrm>
         </p:spPr>
         <p:txBody>
@@ -5239,7 +5854,7 @@
                 <a:latin typeface="Minecraft" panose="02000603000000000000" pitchFamily="2" charset="0"/>
                 <a:ea typeface="Minecraft" panose="02000603000000000000" pitchFamily="2" charset="0"/>
               </a:rPr>
-              <a:t>ENDE</a:t>
+              <a:t>END</a:t>
             </a:r>
             <a:endParaRPr lang="de-CH" dirty="0">
               <a:solidFill>
@@ -5266,11 +5881,11 @@
           <p:nvPr/>
         </p:nvPicPr>
         <p:blipFill>
-          <a:blip r:embed="rId3">
+          <a:blip r:embed="rId6">
             <a:extLst>
               <a:ext uri="{BEBA8EAE-BF5A-486C-A8C5-ECC9F3942E4B}">
                 <a14:imgProps xmlns:a14="http://schemas.microsoft.com/office/drawing/2010/main">
-                  <a14:imgLayer r:embed="rId4">
+                  <a14:imgLayer r:embed="rId7">
                     <a14:imgEffect>
                       <a14:brightnessContrast bright="-40000"/>
                     </a14:imgEffect>
@@ -5285,6 +5900,43 @@
           <a:xfrm>
             <a:off x="1193800" y="5051822"/>
             <a:ext cx="774699" cy="847328"/>
+          </a:xfrm>
+          <a:prstGeom prst="rect">
+            <a:avLst/>
+          </a:prstGeom>
+        </p:spPr>
+      </p:pic>
+      <p:pic>
+        <p:nvPicPr>
+          <p:cNvPr id="15" name="Grafik 14">
+            <a:extLst>
+              <a:ext uri="{FF2B5EF4-FFF2-40B4-BE49-F238E27FC236}">
+                <a16:creationId xmlns:a16="http://schemas.microsoft.com/office/drawing/2014/main" id="{3182872C-BD4E-96A0-17BE-F9987F1DF016}"/>
+              </a:ext>
+            </a:extLst>
+          </p:cNvPr>
+          <p:cNvPicPr>
+            <a:picLocks noChangeAspect="1"/>
+          </p:cNvPicPr>
+          <p:nvPr/>
+        </p:nvPicPr>
+        <p:blipFill>
+          <a:blip r:embed="rId8">
+            <a:extLst>
+              <a:ext uri="{28A0092B-C50C-407E-A947-70E740481C1C}">
+                <a14:useLocalDpi xmlns:a14="http://schemas.microsoft.com/office/drawing/2010/main" val="0"/>
+              </a:ext>
+            </a:extLst>
+          </a:blip>
+          <a:srcRect b="86055"/>
+          <a:stretch>
+            <a:fillRect/>
+          </a:stretch>
+        </p:blipFill>
+        <p:spPr>
+          <a:xfrm>
+            <a:off x="0" y="-478175"/>
+            <a:ext cx="12192000" cy="956350"/>
           </a:xfrm>
           <a:prstGeom prst="rect">
             <a:avLst/>
@@ -5302,7 +5954,7 @@
     <a:masterClrMapping/>
   </p:clrMapOvr>
   <p:transition spd="slow">
-    <p:push dir="r"/>
+    <p:push dir="u"/>
   </p:transition>
 </p:sld>
 </file>

--- a/Dokumentation/MinecraftWikiPPTX.pptx
+++ b/Dokumentation/MinecraftWikiPPTX.pptx
@@ -6146,7 +6146,7 @@
                 <a:latin typeface="Minecraft" panose="02000603000000000000" pitchFamily="2" charset="0"/>
                 <a:ea typeface="Minecraft" panose="02000603000000000000" pitchFamily="2" charset="0"/>
               </a:rPr>
-              <a:t>Kontrolliren</a:t>
+              <a:t>Kontrollieren</a:t>
             </a:r>
           </a:p>
           <a:p>
@@ -7300,12 +7300,12 @@
         <p:spPr>
           <a:xfrm>
             <a:off x="838200" y="2329830"/>
-            <a:ext cx="10515600" cy="3153600"/>
+            <a:ext cx="5257800" cy="3153600"/>
           </a:xfrm>
         </p:spPr>
         <p:txBody>
           <a:bodyPr>
-            <a:normAutofit fontScale="55000" lnSpcReduction="20000"/>
+            <a:normAutofit fontScale="92500"/>
           </a:bodyPr>
           <a:lstStyle/>
           <a:p>
@@ -7432,9 +7432,8 @@
             </a:r>
           </a:p>
           <a:p>
-            <a:pPr>
-              <a:buFont typeface="Wingdings" panose="05000000000000000000" pitchFamily="2" charset="2"/>
-              <a:buChar char="§"/>
+            <a:pPr marL="0" indent="0">
+              <a:buNone/>
             </a:pPr>
             <a:endParaRPr lang="de-CH" sz="2000" dirty="0">
               <a:solidFill>
@@ -7448,68 +7447,6 @@
             <a:pPr marL="0" indent="0">
               <a:buNone/>
             </a:pPr>
-            <a:r>
-              <a:rPr lang="de-CH" sz="2000" dirty="0">
-                <a:solidFill>
-                  <a:schemeClr val="bg1"/>
-                </a:solidFill>
-                <a:latin typeface="Minecraft" panose="02000603000000000000" pitchFamily="2" charset="0"/>
-                <a:ea typeface="Minecraft" panose="02000603000000000000" pitchFamily="2" charset="0"/>
-              </a:rPr>
-              <a:t>3 Woche</a:t>
-            </a:r>
-          </a:p>
-          <a:p>
-            <a:pPr>
-              <a:buFont typeface="Wingdings" panose="05000000000000000000" pitchFamily="2" charset="2"/>
-              <a:buChar char="§"/>
-            </a:pPr>
-            <a:r>
-              <a:rPr lang="de-CH" sz="2000" dirty="0" err="1">
-                <a:solidFill>
-                  <a:schemeClr val="bg1"/>
-                </a:solidFill>
-                <a:latin typeface="Minecraft" panose="02000603000000000000" pitchFamily="2" charset="0"/>
-                <a:ea typeface="Minecraft" panose="02000603000000000000" pitchFamily="2" charset="0"/>
-              </a:rPr>
-              <a:t>Praesentation</a:t>
-            </a:r>
-            <a:r>
-              <a:rPr lang="de-CH" sz="2000" dirty="0">
-                <a:solidFill>
-                  <a:schemeClr val="bg1"/>
-                </a:solidFill>
-                <a:latin typeface="Minecraft" panose="02000603000000000000" pitchFamily="2" charset="0"/>
-                <a:ea typeface="Minecraft" panose="02000603000000000000" pitchFamily="2" charset="0"/>
-              </a:rPr>
-              <a:t> anfangen</a:t>
-            </a:r>
-          </a:p>
-          <a:p>
-            <a:pPr>
-              <a:buFont typeface="Wingdings" panose="05000000000000000000" pitchFamily="2" charset="2"/>
-              <a:buChar char="§"/>
-            </a:pPr>
-            <a:r>
-              <a:rPr lang="de-CH" sz="2000" dirty="0">
-                <a:solidFill>
-                  <a:schemeClr val="bg1"/>
-                </a:solidFill>
-                <a:latin typeface="Minecraft" panose="02000603000000000000" pitchFamily="2" charset="0"/>
-                <a:ea typeface="Minecraft" panose="02000603000000000000" pitchFamily="2" charset="0"/>
-              </a:rPr>
-              <a:t>Dokumente weiter </a:t>
-            </a:r>
-            <a:r>
-              <a:rPr lang="de-CH" sz="2000" dirty="0" err="1">
-                <a:solidFill>
-                  <a:schemeClr val="bg1"/>
-                </a:solidFill>
-                <a:latin typeface="Minecraft" panose="02000603000000000000" pitchFamily="2" charset="0"/>
-                <a:ea typeface="Minecraft" panose="02000603000000000000" pitchFamily="2" charset="0"/>
-              </a:rPr>
-              <a:t>fuehren</a:t>
-            </a:r>
             <a:endParaRPr lang="de-CH" sz="2000" dirty="0">
               <a:solidFill>
                 <a:schemeClr val="bg1"/>
@@ -7518,12 +7455,231 @@
               <a:ea typeface="Minecraft" panose="02000603000000000000" pitchFamily="2" charset="0"/>
             </a:endParaRPr>
           </a:p>
+        </p:txBody>
+      </p:sp>
+      <p:sp>
+        <p:nvSpPr>
+          <p:cNvPr id="5" name="Inhaltsplatzhalter 2">
+            <a:extLst>
+              <a:ext uri="{FF2B5EF4-FFF2-40B4-BE49-F238E27FC236}">
+                <a16:creationId xmlns:a16="http://schemas.microsoft.com/office/drawing/2014/main" id="{C30D90A5-2619-B7F7-9CB8-3A3ED1F5BA8C}"/>
+              </a:ext>
+            </a:extLst>
+          </p:cNvPr>
+          <p:cNvSpPr txBox="1">
+            <a:spLocks/>
+          </p:cNvSpPr>
+          <p:nvPr/>
+        </p:nvSpPr>
+        <p:spPr>
+          <a:xfrm>
+            <a:off x="6096000" y="2329830"/>
+            <a:ext cx="5257800" cy="3153600"/>
+          </a:xfrm>
+          <a:prstGeom prst="rect">
+            <a:avLst/>
+          </a:prstGeom>
+        </p:spPr>
+        <p:txBody>
+          <a:bodyPr vert="horz" lIns="91440" tIns="45720" rIns="91440" bIns="45720" rtlCol="0">
+            <a:normAutofit/>
+          </a:bodyPr>
+          <a:lstStyle>
+            <a:lvl1pPr marL="228600" indent="-228600" algn="l" defTabSz="914400" rtl="0" eaLnBrk="1" latinLnBrk="0" hangingPunct="1">
+              <a:lnSpc>
+                <a:spcPct val="90000"/>
+              </a:lnSpc>
+              <a:spcBef>
+                <a:spcPts val="1000"/>
+              </a:spcBef>
+              <a:buFont typeface="Arial" panose="020B0604020202020204" pitchFamily="34" charset="0"/>
+              <a:buChar char="•"/>
+              <a:defRPr sz="2800" kern="1200">
+                <a:solidFill>
+                  <a:schemeClr val="tx1"/>
+                </a:solidFill>
+                <a:latin typeface="+mn-lt"/>
+                <a:ea typeface="+mn-ea"/>
+                <a:cs typeface="+mn-cs"/>
+              </a:defRPr>
+            </a:lvl1pPr>
+            <a:lvl2pPr marL="685800" indent="-228600" algn="l" defTabSz="914400" rtl="0" eaLnBrk="1" latinLnBrk="0" hangingPunct="1">
+              <a:lnSpc>
+                <a:spcPct val="90000"/>
+              </a:lnSpc>
+              <a:spcBef>
+                <a:spcPts val="500"/>
+              </a:spcBef>
+              <a:buFont typeface="Arial" panose="020B0604020202020204" pitchFamily="34" charset="0"/>
+              <a:buChar char="•"/>
+              <a:defRPr sz="2400" kern="1200">
+                <a:solidFill>
+                  <a:schemeClr val="tx1"/>
+                </a:solidFill>
+                <a:latin typeface="+mn-lt"/>
+                <a:ea typeface="+mn-ea"/>
+                <a:cs typeface="+mn-cs"/>
+              </a:defRPr>
+            </a:lvl2pPr>
+            <a:lvl3pPr marL="1143000" indent="-228600" algn="l" defTabSz="914400" rtl="0" eaLnBrk="1" latinLnBrk="0" hangingPunct="1">
+              <a:lnSpc>
+                <a:spcPct val="90000"/>
+              </a:lnSpc>
+              <a:spcBef>
+                <a:spcPts val="500"/>
+              </a:spcBef>
+              <a:buFont typeface="Arial" panose="020B0604020202020204" pitchFamily="34" charset="0"/>
+              <a:buChar char="•"/>
+              <a:defRPr sz="2000" kern="1200">
+                <a:solidFill>
+                  <a:schemeClr val="tx1"/>
+                </a:solidFill>
+                <a:latin typeface="+mn-lt"/>
+                <a:ea typeface="+mn-ea"/>
+                <a:cs typeface="+mn-cs"/>
+              </a:defRPr>
+            </a:lvl3pPr>
+            <a:lvl4pPr marL="1600200" indent="-228600" algn="l" defTabSz="914400" rtl="0" eaLnBrk="1" latinLnBrk="0" hangingPunct="1">
+              <a:lnSpc>
+                <a:spcPct val="90000"/>
+              </a:lnSpc>
+              <a:spcBef>
+                <a:spcPts val="500"/>
+              </a:spcBef>
+              <a:buFont typeface="Arial" panose="020B0604020202020204" pitchFamily="34" charset="0"/>
+              <a:buChar char="•"/>
+              <a:defRPr sz="1800" kern="1200">
+                <a:solidFill>
+                  <a:schemeClr val="tx1"/>
+                </a:solidFill>
+                <a:latin typeface="+mn-lt"/>
+                <a:ea typeface="+mn-ea"/>
+                <a:cs typeface="+mn-cs"/>
+              </a:defRPr>
+            </a:lvl4pPr>
+            <a:lvl5pPr marL="2057400" indent="-228600" algn="l" defTabSz="914400" rtl="0" eaLnBrk="1" latinLnBrk="0" hangingPunct="1">
+              <a:lnSpc>
+                <a:spcPct val="90000"/>
+              </a:lnSpc>
+              <a:spcBef>
+                <a:spcPts val="500"/>
+              </a:spcBef>
+              <a:buFont typeface="Arial" panose="020B0604020202020204" pitchFamily="34" charset="0"/>
+              <a:buChar char="•"/>
+              <a:defRPr sz="1800" kern="1200">
+                <a:solidFill>
+                  <a:schemeClr val="tx1"/>
+                </a:solidFill>
+                <a:latin typeface="+mn-lt"/>
+                <a:ea typeface="+mn-ea"/>
+                <a:cs typeface="+mn-cs"/>
+              </a:defRPr>
+            </a:lvl5pPr>
+            <a:lvl6pPr marL="2514600" indent="-228600" algn="l" defTabSz="914400" rtl="0" eaLnBrk="1" latinLnBrk="0" hangingPunct="1">
+              <a:lnSpc>
+                <a:spcPct val="90000"/>
+              </a:lnSpc>
+              <a:spcBef>
+                <a:spcPts val="500"/>
+              </a:spcBef>
+              <a:buFont typeface="Arial" panose="020B0604020202020204" pitchFamily="34" charset="0"/>
+              <a:buChar char="•"/>
+              <a:defRPr sz="1800" kern="1200">
+                <a:solidFill>
+                  <a:schemeClr val="tx1"/>
+                </a:solidFill>
+                <a:latin typeface="+mn-lt"/>
+                <a:ea typeface="+mn-ea"/>
+                <a:cs typeface="+mn-cs"/>
+              </a:defRPr>
+            </a:lvl6pPr>
+            <a:lvl7pPr marL="2971800" indent="-228600" algn="l" defTabSz="914400" rtl="0" eaLnBrk="1" latinLnBrk="0" hangingPunct="1">
+              <a:lnSpc>
+                <a:spcPct val="90000"/>
+              </a:lnSpc>
+              <a:spcBef>
+                <a:spcPts val="500"/>
+              </a:spcBef>
+              <a:buFont typeface="Arial" panose="020B0604020202020204" pitchFamily="34" charset="0"/>
+              <a:buChar char="•"/>
+              <a:defRPr sz="1800" kern="1200">
+                <a:solidFill>
+                  <a:schemeClr val="tx1"/>
+                </a:solidFill>
+                <a:latin typeface="+mn-lt"/>
+                <a:ea typeface="+mn-ea"/>
+                <a:cs typeface="+mn-cs"/>
+              </a:defRPr>
+            </a:lvl7pPr>
+            <a:lvl8pPr marL="3429000" indent="-228600" algn="l" defTabSz="914400" rtl="0" eaLnBrk="1" latinLnBrk="0" hangingPunct="1">
+              <a:lnSpc>
+                <a:spcPct val="90000"/>
+              </a:lnSpc>
+              <a:spcBef>
+                <a:spcPts val="500"/>
+              </a:spcBef>
+              <a:buFont typeface="Arial" panose="020B0604020202020204" pitchFamily="34" charset="0"/>
+              <a:buChar char="•"/>
+              <a:defRPr sz="1800" kern="1200">
+                <a:solidFill>
+                  <a:schemeClr val="tx1"/>
+                </a:solidFill>
+                <a:latin typeface="+mn-lt"/>
+                <a:ea typeface="+mn-ea"/>
+                <a:cs typeface="+mn-cs"/>
+              </a:defRPr>
+            </a:lvl8pPr>
+            <a:lvl9pPr marL="3886200" indent="-228600" algn="l" defTabSz="914400" rtl="0" eaLnBrk="1" latinLnBrk="0" hangingPunct="1">
+              <a:lnSpc>
+                <a:spcPct val="90000"/>
+              </a:lnSpc>
+              <a:spcBef>
+                <a:spcPts val="500"/>
+              </a:spcBef>
+              <a:buFont typeface="Arial" panose="020B0604020202020204" pitchFamily="34" charset="0"/>
+              <a:buChar char="•"/>
+              <a:defRPr sz="1800" kern="1200">
+                <a:solidFill>
+                  <a:schemeClr val="tx1"/>
+                </a:solidFill>
+                <a:latin typeface="+mn-lt"/>
+                <a:ea typeface="+mn-ea"/>
+                <a:cs typeface="+mn-cs"/>
+              </a:defRPr>
+            </a:lvl9pPr>
+          </a:lstStyle>
+          <a:p>
+            <a:pPr marL="0" indent="0">
+              <a:buFont typeface="Arial" panose="020B0604020202020204" pitchFamily="34" charset="0"/>
+              <a:buNone/>
+            </a:pPr>
+            <a:r>
+              <a:rPr lang="de-CH" sz="2000" dirty="0">
+                <a:solidFill>
+                  <a:schemeClr val="bg1"/>
+                </a:solidFill>
+                <a:latin typeface="Minecraft" panose="02000603000000000000" pitchFamily="2" charset="0"/>
+                <a:ea typeface="Minecraft" panose="02000603000000000000" pitchFamily="2" charset="0"/>
+              </a:rPr>
+              <a:t>3 Woche</a:t>
+            </a:r>
+          </a:p>
           <a:p>
             <a:pPr>
               <a:buFont typeface="Wingdings" panose="05000000000000000000" pitchFamily="2" charset="2"/>
               <a:buChar char="§"/>
             </a:pPr>
             <a:r>
+              <a:rPr lang="de-CH" sz="2000" dirty="0" err="1">
+                <a:solidFill>
+                  <a:schemeClr val="bg1"/>
+                </a:solidFill>
+                <a:latin typeface="Minecraft" panose="02000603000000000000" pitchFamily="2" charset="0"/>
+                <a:ea typeface="Minecraft" panose="02000603000000000000" pitchFamily="2" charset="0"/>
+              </a:rPr>
+              <a:t>Praesentation</a:t>
+            </a:r>
+            <a:r>
               <a:rPr lang="de-CH" sz="2000" dirty="0">
                 <a:solidFill>
                   <a:schemeClr val="bg1"/>
@@ -7531,7 +7687,7 @@
                 <a:latin typeface="Minecraft" panose="02000603000000000000" pitchFamily="2" charset="0"/>
                 <a:ea typeface="Minecraft" panose="02000603000000000000" pitchFamily="2" charset="0"/>
               </a:rPr>
-              <a:t>Server und Webseite Testen</a:t>
+              <a:t> anfangen</a:t>
             </a:r>
           </a:p>
           <a:p>
@@ -7539,6 +7695,26 @@
               <a:buFont typeface="Wingdings" panose="05000000000000000000" pitchFamily="2" charset="2"/>
               <a:buChar char="§"/>
             </a:pPr>
+            <a:r>
+              <a:rPr lang="de-CH" sz="2000" dirty="0">
+                <a:solidFill>
+                  <a:schemeClr val="bg1"/>
+                </a:solidFill>
+                <a:latin typeface="Minecraft" panose="02000603000000000000" pitchFamily="2" charset="0"/>
+                <a:ea typeface="Minecraft" panose="02000603000000000000" pitchFamily="2" charset="0"/>
+              </a:rPr>
+              <a:t>Dokumente weiter </a:t>
+            </a:r>
+            <a:r>
+              <a:rPr lang="de-CH" sz="2000" dirty="0" err="1">
+                <a:solidFill>
+                  <a:schemeClr val="bg1"/>
+                </a:solidFill>
+                <a:latin typeface="Minecraft" panose="02000603000000000000" pitchFamily="2" charset="0"/>
+                <a:ea typeface="Minecraft" panose="02000603000000000000" pitchFamily="2" charset="0"/>
+              </a:rPr>
+              <a:t>fuehren</a:t>
+            </a:r>
             <a:endParaRPr lang="de-CH" sz="2000" dirty="0">
               <a:solidFill>
                 <a:schemeClr val="bg1"/>
@@ -7548,8 +7724,25 @@
             </a:endParaRPr>
           </a:p>
           <a:p>
-            <a:pPr marL="0" indent="0">
-              <a:buNone/>
+            <a:pPr>
+              <a:buFont typeface="Wingdings" panose="05000000000000000000" pitchFamily="2" charset="2"/>
+              <a:buChar char="§"/>
+            </a:pPr>
+            <a:r>
+              <a:rPr lang="de-CH" sz="2000" dirty="0">
+                <a:solidFill>
+                  <a:schemeClr val="bg1"/>
+                </a:solidFill>
+                <a:latin typeface="Minecraft" panose="02000603000000000000" pitchFamily="2" charset="0"/>
+                <a:ea typeface="Minecraft" panose="02000603000000000000" pitchFamily="2" charset="0"/>
+              </a:rPr>
+              <a:t>Server und Webseite Testen</a:t>
+            </a:r>
+          </a:p>
+          <a:p>
+            <a:pPr>
+              <a:buFont typeface="Wingdings" panose="05000000000000000000" pitchFamily="2" charset="2"/>
+              <a:buChar char="§"/>
             </a:pPr>
             <a:endParaRPr lang="de-CH" sz="2000" dirty="0">
               <a:solidFill>
@@ -7561,6 +7754,20 @@
           </a:p>
           <a:p>
             <a:pPr marL="0" indent="0">
+              <a:buFont typeface="Arial" panose="020B0604020202020204" pitchFamily="34" charset="0"/>
+              <a:buNone/>
+            </a:pPr>
+            <a:endParaRPr lang="de-CH" sz="2000" dirty="0">
+              <a:solidFill>
+                <a:schemeClr val="bg1"/>
+              </a:solidFill>
+              <a:latin typeface="Minecraft" panose="02000603000000000000" pitchFamily="2" charset="0"/>
+              <a:ea typeface="Minecraft" panose="02000603000000000000" pitchFamily="2" charset="0"/>
+            </a:endParaRPr>
+          </a:p>
+          <a:p>
+            <a:pPr marL="0" indent="0">
+              <a:buFont typeface="Arial" panose="020B0604020202020204" pitchFamily="34" charset="0"/>
               <a:buNone/>
             </a:pPr>
             <a:endParaRPr lang="de-CH" sz="2000" dirty="0">

--- a/Dokumentation/MinecraftWikiPPTX.pptx
+++ b/Dokumentation/MinecraftWikiPPTX.pptx
@@ -4609,7 +4609,7 @@
                 <a:latin typeface="Minecraft" panose="02000603000000000000" pitchFamily="2" charset="0"/>
                 <a:ea typeface="Minecraft" panose="02000603000000000000" pitchFamily="2" charset="0"/>
               </a:rPr>
-              <a:t>2 Lektion fertig</a:t>
+              <a:t>2. Lektion fertig</a:t>
             </a:r>
           </a:p>
           <a:p>
@@ -5019,7 +5019,7 @@
                 <a:latin typeface="Minecraft" panose="02000603000000000000" pitchFamily="2" charset="0"/>
                 <a:ea typeface="Minecraft" panose="02000603000000000000" pitchFamily="2" charset="0"/>
               </a:rPr>
-              <a:t>Einschautzung</a:t>
+              <a:t>Einschaetzung</a:t>
             </a:r>
             <a:endParaRPr lang="de-CH" sz="2000" dirty="0">
               <a:solidFill>
@@ -5836,8 +5836,8 @@
         </p:nvSpPr>
         <p:spPr>
           <a:xfrm>
-            <a:off x="4740082" y="3429000"/>
-            <a:ext cx="2711837" cy="1325563"/>
+            <a:off x="3190952" y="3429000"/>
+            <a:ext cx="5810096" cy="1325563"/>
           </a:xfrm>
         </p:spPr>
         <p:txBody>
@@ -5846,6 +5846,7 @@
           </a:bodyPr>
           <a:lstStyle/>
           <a:p>
+            <a:pPr algn="ctr"/>
             <a:r>
               <a:rPr lang="de-CH" sz="10700" dirty="0">
                 <a:solidFill>
@@ -5854,7 +5855,7 @@
                 <a:latin typeface="Minecraft" panose="02000603000000000000" pitchFamily="2" charset="0"/>
                 <a:ea typeface="Minecraft" panose="02000603000000000000" pitchFamily="2" charset="0"/>
               </a:rPr>
-              <a:t>END</a:t>
+              <a:t>THE END</a:t>
             </a:r>
             <a:endParaRPr lang="de-CH" dirty="0">
               <a:solidFill>
@@ -7320,7 +7321,7 @@
                 <a:latin typeface="Minecraft" panose="02000603000000000000" pitchFamily="2" charset="0"/>
                 <a:ea typeface="Minecraft" panose="02000603000000000000" pitchFamily="2" charset="0"/>
               </a:rPr>
-              <a:t>1 Woche</a:t>
+              <a:t>1. Woche</a:t>
             </a:r>
           </a:p>
           <a:p>
@@ -7380,7 +7381,7 @@
                 <a:latin typeface="Minecraft" panose="02000603000000000000" pitchFamily="2" charset="0"/>
                 <a:ea typeface="Minecraft" panose="02000603000000000000" pitchFamily="2" charset="0"/>
               </a:rPr>
-              <a:t>2 Woche </a:t>
+              <a:t>2. Woche </a:t>
             </a:r>
           </a:p>
           <a:p>
@@ -7661,7 +7662,7 @@
                 <a:latin typeface="Minecraft" panose="02000603000000000000" pitchFamily="2" charset="0"/>
                 <a:ea typeface="Minecraft" panose="02000603000000000000" pitchFamily="2" charset="0"/>
               </a:rPr>
-              <a:t>3 Woche</a:t>
+              <a:t>3. Woche</a:t>
             </a:r>
           </a:p>
           <a:p>
@@ -8185,7 +8186,7 @@
                 <a:latin typeface="Minecraft" panose="02000603000000000000" pitchFamily="2" charset="0"/>
                 <a:ea typeface="Minecraft" panose="02000603000000000000" pitchFamily="2" charset="0"/>
               </a:rPr>
-              <a:t>Angefangen zum Coden</a:t>
+              <a:t>Angefangen mit Coden</a:t>
             </a:r>
           </a:p>
           <a:p>
